--- a/testdata/pptx/missing-chart.pptx
+++ b/testdata/pptx/missing-chart.pptx
@@ -6,6 +6,16 @@
   </p:sldIdLst>
   <p:sldSz cx="9144000" cy="6858000"/>
 </p:presentation>
+</file>
+
+<file path=ppt/charts/empty.xml><?xml version="1.0" encoding="utf-8"?>
+<c:chartSpace xmlns:a="http://schemas.openxmlformats.org/drawingml/2006/main" xmlns:c="http://schemas.openxmlformats.org/drawingml/2006/chart">
+  <c:chart>
+    <c:plotArea>
+      <c:barChart/>
+    </c:plotArea>
+  </c:chart>
+</c:chartSpace>
 </file>
 
 <file path=ppt/slideLayouts/slideLayout1.xml><?xml version="1.0" encoding="utf-8"?>
@@ -139,6 +149,22 @@
           </a:graphicData>
         </a:graphic>
       </p:graphicFrame>
+      <p:graphicFrame>
+        <p:nvGraphicFramePr>
+          <p:cNvPr id="4" name="Empty chart"/>
+          <p:cNvGraphicFramePr/>
+          <p:nvPr/>
+        </p:nvGraphicFramePr>
+        <p:xfrm>
+          <a:off x="4572000" y="914400"/>
+          <a:ext cx="3657600" cy="1828800"/>
+        </p:xfrm>
+        <a:graphic>
+          <a:graphicData xmlns:c="http://schemas.openxmlformats.org/drawingml/2006/chart" uri="http://schemas.openxmlformats.org/drawingml/2006/chart">
+            <c:chart r:id="rIdEmptyChart"/>
+          </a:graphicData>
+        </a:graphic>
+      </p:graphicFrame>
       <p:sp>
         <p:nvSpPr>
           <p:cNvPr id="3" name="Survivor"/>
